--- a/assets/ppts/M3.4_Link_Layer_Addressing_ARP.pptx
+++ b/assets/ppts/M3.4_Link_Layer_Addressing_ARP.pptx
@@ -8,6 +8,7 @@
     <p:sldId id="256" r:id="rId7"/>
     <p:sldId id="257" r:id="rId8"/>
     <p:sldId id="258" r:id="rId9"/>
+    <p:sldId id="259" r:id="rId10"/>
   </p:sldIdLst>
   <p:sldSz cx="12191695" cy="6858000" type="screen4x3"/>
   <p:notesSz cx="6858000" cy="9144000"/>
@@ -3141,8 +3142,8 @@
         </p:nvSpPr>
         <p:spPr>
           <a:xfrm>
-            <a:off x="822960" y="1188720"/>
-            <a:ext cx="164592" cy="4480560"/>
+            <a:off x="0" y="0"/>
+            <a:ext cx="12191695" cy="137160"/>
           </a:xfrm>
           <a:prstGeom prst="rect">
             <a:avLst/>
@@ -3178,14 +3179,57 @@
       </p:sp>
       <p:sp>
         <p:nvSpPr>
-          <p:cNvPr id="4" name="TextBox 3"/>
+          <p:cNvPr id="4" name="Rectangle 3"/>
+          <p:cNvSpPr/>
+          <p:nvPr/>
+        </p:nvSpPr>
+        <p:spPr>
+          <a:xfrm>
+            <a:off x="822960" y="1097280"/>
+            <a:ext cx="164592" cy="4663440"/>
+          </a:xfrm>
+          <a:prstGeom prst="rect">
+            <a:avLst/>
+          </a:prstGeom>
+          <a:solidFill>
+            <a:srgbClr val="D97706"/>
+          </a:solidFill>
+          <a:ln>
+            <a:noFill/>
+          </a:ln>
+        </p:spPr>
+        <p:style>
+          <a:lnRef idx="1">
+            <a:schemeClr val="accent1"/>
+          </a:lnRef>
+          <a:fillRef idx="3">
+            <a:schemeClr val="accent1"/>
+          </a:fillRef>
+          <a:effectRef idx="2">
+            <a:schemeClr val="accent1"/>
+          </a:effectRef>
+          <a:fontRef idx="minor">
+            <a:schemeClr val="lt1"/>
+          </a:fontRef>
+        </p:style>
+        <p:txBody>
+          <a:bodyPr rtlCol="0" anchor="ctr"/>
+          <a:lstStyle/>
+          <a:p>
+            <a:pPr algn="ctr"/>
+          </a:p>
+        </p:txBody>
+      </p:sp>
+      <p:sp>
+        <p:nvSpPr>
+          <p:cNvPr id="5" name="TextBox 4"/>
           <p:cNvSpPr txBox="1"/>
           <p:nvPr/>
         </p:nvSpPr>
         <p:spPr>
           <a:xfrm>
-            <a:off x="1280160" y="1097280"/>
-            <a:ext cx="10058400" cy="4663440"/>
+            <a:off x="1234440" y="1005840"/>
+            <a:ext cx="10241280" cy="4846320"/>
           </a:xfrm>
           <a:prstGeom prst="rect">
             <a:avLst/>
@@ -3200,70 +3244,165 @@
           <a:p>
             <a:pPr>
               <a:spcAft>
+                <a:spcPts val="1000"/>
+              </a:spcAft>
+              <a:defRPr b="1" sz="1300">
+                <a:solidFill>
+                  <a:srgbClr val="D97706"/>
+                </a:solidFill>
+              </a:defRPr>
+            </a:pPr>
+            <a:r>
+              <a:t>PCCST501 Computer Networks | KTU 2024 Scheme • MODULE 3 • M3.4</a:t>
+            </a:r>
+          </a:p>
+          <a:p>
+            <a:pPr>
+              <a:spcAft>
                 <a:spcPts val="1200"/>
               </a:spcAft>
-              <a:defRPr b="1" sz="1300">
-                <a:solidFill>
-                  <a:srgbClr val="D97706"/>
-                </a:solidFill>
-              </a:defRPr>
-            </a:pPr>
-            <a:r>
-              <a:t>PCCST501 Computer Networks | KTU 2024 Scheme • MODULE 3 • M3.4</a:t>
+              <a:defRPr b="1" sz="3000">
+                <a:solidFill>
+                  <a:srgbClr val="F8FAFC"/>
+                </a:solidFill>
+              </a:defRPr>
+            </a:pPr>
+            <a:r>
+              <a:t>Link-Layer Addressing &amp; Address Resolution Protocol (ARP)</a:t>
             </a:r>
           </a:p>
           <a:p>
             <a:pPr>
               <a:spcAft>
-                <a:spcPts val="1400"/>
+                <a:spcPts val="2400"/>
               </a:spcAft>
-              <a:defRPr b="1" sz="3200">
-                <a:solidFill>
-                  <a:srgbClr val="F8FAFC"/>
-                </a:solidFill>
-              </a:defRPr>
-            </a:pPr>
-            <a:r>
-              <a:t>Link Layer Addressing &amp; Address Resolution Protocol (ARP)</a:t>
+              <a:defRPr sz="1600">
+                <a:solidFill>
+                  <a:srgbClr val="94A3B8"/>
+                </a:solidFill>
+              </a:defRPr>
+            </a:pPr>
+            <a:r>
+              <a:t>48-Bit MAC Addresses (EUI-48), ARP Request (Broadcast) &amp; ARP Reply (Unicast), ARP Cache &amp; Timeout, Proxy ARP, Subnet Crossing</a:t>
             </a:r>
           </a:p>
           <a:p>
             <a:pPr>
               <a:spcAft>
-                <a:spcPts val="2800"/>
+                <a:spcPts val="300"/>
               </a:spcAft>
-              <a:defRPr sz="1700">
+              <a:defRPr b="1" sz="1350">
+                <a:solidFill>
+                  <a:srgbClr val="E2E8F0"/>
+                </a:solidFill>
+              </a:defRPr>
+            </a:pPr>
+            <a:r>
+              <a:t>Prepared by: Prof. Anju Markose | Assistant Professor, Dept. of CSE | VJCET</a:t>
+            </a:r>
+          </a:p>
+          <a:p>
+            <a:pPr>
+              <a:defRPr sz="1150">
                 <a:solidFill>
                   <a:srgbClr val="94A3B8"/>
                 </a:solidFill>
               </a:defRPr>
             </a:pPr>
             <a:r>
-              <a:t>48-Bit IEEE MAC Addresses, OUI Vendor Allocation, ARP Query &amp; Reply Protocol Mechanism</a:t>
-            </a:r>
-          </a:p>
+              <a:t>Viswajyothi College of Engineering and Technology (VJCET), Vazhakulam • KTU S5 CSE</a:t>
+            </a:r>
+          </a:p>
+        </p:txBody>
+      </p:sp>
+      <p:sp>
+        <p:nvSpPr>
+          <p:cNvPr id="6" name="Rounded Rectangle 5"/>
+          <p:cNvSpPr/>
+          <p:nvPr/>
+        </p:nvSpPr>
+        <p:spPr>
+          <a:xfrm>
+            <a:off x="8412480" y="5120640"/>
+            <a:ext cx="3017520" cy="822960"/>
+          </a:xfrm>
+          <a:prstGeom prst="roundRect">
+            <a:avLst/>
+          </a:prstGeom>
+          <a:solidFill>
+            <a:srgbClr val="1E293B"/>
+          </a:solidFill>
+          <a:ln w="12700">
+            <a:solidFill>
+              <a:srgbClr val="0E7490"/>
+            </a:solidFill>
+          </a:ln>
+        </p:spPr>
+        <p:style>
+          <a:lnRef idx="1">
+            <a:schemeClr val="accent1"/>
+          </a:lnRef>
+          <a:fillRef idx="3">
+            <a:schemeClr val="accent1"/>
+          </a:fillRef>
+          <a:effectRef idx="2">
+            <a:schemeClr val="accent1"/>
+          </a:effectRef>
+          <a:fontRef idx="minor">
+            <a:schemeClr val="lt1"/>
+          </a:fontRef>
+        </p:style>
+        <p:txBody>
+          <a:bodyPr rtlCol="0" anchor="ctr"/>
+          <a:lstStyle/>
+          <a:p>
+            <a:pPr algn="ctr"/>
+          </a:p>
+        </p:txBody>
+      </p:sp>
+      <p:sp>
+        <p:nvSpPr>
+          <p:cNvPr id="7" name="TextBox 6"/>
+          <p:cNvSpPr txBox="1"/>
+          <p:nvPr/>
+        </p:nvSpPr>
+        <p:spPr>
+          <a:xfrm>
+            <a:off x="8503920" y="5166360"/>
+            <a:ext cx="2834640" cy="731520"/>
+          </a:xfrm>
+          <a:prstGeom prst="rect">
+            <a:avLst/>
+          </a:prstGeom>
+          <a:noFill/>
+        </p:spPr>
+        <p:txBody>
+          <a:bodyPr wrap="none">
+            <a:spAutoFit/>
+          </a:bodyPr>
+          <a:lstStyle/>
           <a:p>
             <a:pPr>
-              <a:defRPr b="1" sz="1300">
-                <a:solidFill>
-                  <a:srgbClr val="E2E8F0"/>
-                </a:solidFill>
-              </a:defRPr>
-            </a:pPr>
-            <a:r>
-              <a:t>Prepared by: Prof. Anju Markose | Assistant Professor, Dept. of CSE | VJCET</a:t>
+              <a:defRPr b="1" sz="1050">
+                <a:solidFill>
+                  <a:srgbClr val="D97706"/>
+                </a:solidFill>
+              </a:defRPr>
+            </a:pPr>
+            <a:r>
+              <a:t>KTU B.Tech Curriculum</a:t>
             </a:r>
           </a:p>
           <a:p>
             <a:pPr>
-              <a:defRPr sz="1100">
-                <a:solidFill>
-                  <a:srgbClr val="94A3B8"/>
-                </a:solidFill>
-              </a:defRPr>
-            </a:pPr>
-            <a:r>
-              <a:t>Viswajyothi College of Engineering and Technology (VJCET), Vazhakulam</a:t>
+              <a:defRPr sz="950">
+                <a:solidFill>
+                  <a:srgbClr val="F8FAFC"/>
+                </a:solidFill>
+              </a:defRPr>
+            </a:pPr>
+            <a:r>
+              <a:t>Official Classroom Slide Deck</a:t>
             </a:r>
           </a:p>
         </p:txBody>
@@ -3395,14 +3534,14 @@
           <a:lstStyle/>
           <a:p>
             <a:pPr>
-              <a:defRPr b="1" sz="2300">
+              <a:defRPr b="1" sz="2200">
                 <a:solidFill>
                   <a:srgbClr val="F8FAFC"/>
                 </a:solidFill>
               </a:defRPr>
             </a:pPr>
             <a:r>
-              <a:t>3.4.1 MAC Addressing Architecture</a:t>
+              <a:t>3.4.1 MAC Addressing &amp; Address Resolution Protocol (ARP)</a:t>
             </a:r>
           </a:p>
         </p:txBody>
@@ -3437,7 +3576,7 @@
               </a:defRPr>
             </a:pPr>
             <a:r>
-              <a:t>M3.4 MAC ADDRESSES</a:t>
+              <a:t>M3.4 ARP PROTOCOL</a:t>
             </a:r>
           </a:p>
         </p:txBody>
@@ -3450,7 +3589,7 @@
         </p:nvSpPr>
         <p:spPr>
           <a:xfrm>
-            <a:off x="731520" y="1280160"/>
+            <a:off x="731520" y="1234440"/>
             <a:ext cx="6858000" cy="4937760"/>
           </a:xfrm>
           <a:prstGeom prst="rect">
@@ -3468,29 +3607,29 @@
               <a:spcAft>
                 <a:spcPts val="200"/>
               </a:spcAft>
-              <a:defRPr b="1" sz="1500">
+              <a:defRPr b="1" sz="1450">
                 <a:solidFill>
                   <a:srgbClr val="0F1E4A"/>
                 </a:solidFill>
               </a:defRPr>
             </a:pPr>
             <a:r>
-              <a:t>• 48-Bit Physical Address (6 Bytes)</a:t>
+              <a:t>• MAC Hardware Address (48 bits / 6 Bytes)</a:t>
             </a:r>
           </a:p>
           <a:p>
             <a:pPr>
               <a:spcAft>
-                <a:spcPts val="800"/>
+                <a:spcPts val="700"/>
               </a:spcAft>
-              <a:defRPr sz="1300">
-                <a:solidFill>
-                  <a:srgbClr val="1E293B"/>
-                </a:solidFill>
-              </a:defRPr>
-            </a:pPr>
-            <a:r>
-              <a:t>   Burned into the Network Interface Card (NIC) ROM. Represented as 12 hexadecimal digits: `00:1A:2B:3C:4D:5E`.</a:t>
+              <a:defRPr sz="1250">
+                <a:solidFill>
+                  <a:srgbClr val="0F172A"/>
+                </a:solidFill>
+              </a:defRPr>
+            </a:pPr>
+            <a:r>
+              <a:t>   Burned into NIC ROM (e.g., `1A:2B:3C:4D:5E:6F`). First 24 bits = OUI (Organizationally Unique Identifier assigned by IEEE); Last 24 bits = Vendor NIC serial number.</a:t>
             </a:r>
           </a:p>
           <a:p>
@@ -3498,29 +3637,29 @@
               <a:spcAft>
                 <a:spcPts val="200"/>
               </a:spcAft>
-              <a:defRPr b="1" sz="1500">
+              <a:defRPr b="1" sz="1450">
                 <a:solidFill>
                   <a:srgbClr val="0F1E4A"/>
                 </a:solidFill>
               </a:defRPr>
             </a:pPr>
             <a:r>
-              <a:t>• Organizationally Unique Identifier (OUI - First 24 bits)</a:t>
+              <a:t>• ARP Mission (RFC 826)</a:t>
             </a:r>
           </a:p>
           <a:p>
             <a:pPr>
               <a:spcAft>
-                <a:spcPts val="800"/>
+                <a:spcPts val="700"/>
               </a:spcAft>
-              <a:defRPr sz="1300">
-                <a:solidFill>
-                  <a:srgbClr val="1E293B"/>
-                </a:solidFill>
-              </a:defRPr>
-            </a:pPr>
-            <a:r>
-              <a:t>   Assigned by IEEE to the hardware manufacturer (e.g. Intel, Cisco, Apple).</a:t>
+              <a:defRPr sz="1250">
+                <a:solidFill>
+                  <a:srgbClr val="0F172A"/>
+                </a:solidFill>
+              </a:defRPr>
+            </a:pPr>
+            <a:r>
+              <a:t>   Dynamically resolves a known 32-bit IP address into its corresponding 48-bit MAC address on the local physical subnet.</a:t>
             </a:r>
           </a:p>
           <a:p>
@@ -3528,29 +3667,29 @@
               <a:spcAft>
                 <a:spcPts val="200"/>
               </a:spcAft>
-              <a:defRPr b="1" sz="1500">
+              <a:defRPr b="1" sz="1450">
                 <a:solidFill>
                   <a:srgbClr val="0F1E4A"/>
                 </a:solidFill>
               </a:defRPr>
             </a:pPr>
             <a:r>
-              <a:t>• NIC Serial Number (Last 24 bits)</a:t>
+              <a:t>• ARP Message Flow</a:t>
             </a:r>
           </a:p>
           <a:p>
             <a:pPr>
               <a:spcAft>
-                <a:spcPts val="800"/>
+                <a:spcPts val="700"/>
               </a:spcAft>
-              <a:defRPr sz="1300">
-                <a:solidFill>
-                  <a:srgbClr val="1E293B"/>
-                </a:solidFill>
-              </a:defRPr>
-            </a:pPr>
-            <a:r>
-              <a:t>   Assigned uniquely by manufacturer to individual network interfaces.</a:t>
+              <a:defRPr sz="1250">
+                <a:solidFill>
+                  <a:srgbClr val="0F172A"/>
+                </a:solidFill>
+              </a:defRPr>
+            </a:pPr>
+            <a:r>
+              <a:t>   1. **ARP Request**: Host broadcasts frame (`FF:FF:FF:FF:FF:FF`) asking: 'Who owns IP 192.168.1.5? Send your MAC to 192.168.1.2'. \n 2. **ARP Reply**: Target host unicasts reply containing its physical MAC address directly to the sender. \n 3. **ARP Table**: Sender caches the mapping in its local ARP Cache table with a TTL timer (typically 20 minutes).</a:t>
             </a:r>
           </a:p>
           <a:p>
@@ -3558,59 +3697,29 @@
               <a:spcAft>
                 <a:spcPts val="200"/>
               </a:spcAft>
-              <a:defRPr b="1" sz="1500">
+              <a:defRPr b="1" sz="1450">
                 <a:solidFill>
                   <a:srgbClr val="0F1E4A"/>
                 </a:solidFill>
               </a:defRPr>
             </a:pPr>
             <a:r>
-              <a:t>• Broadcast MAC Address</a:t>
+              <a:t>• Proxy ARP &amp; Gratuitous ARP</a:t>
             </a:r>
           </a:p>
           <a:p>
             <a:pPr>
               <a:spcAft>
-                <a:spcPts val="800"/>
+                <a:spcPts val="700"/>
               </a:spcAft>
-              <a:defRPr sz="1300">
-                <a:solidFill>
-                  <a:srgbClr val="1E293B"/>
-                </a:solidFill>
-              </a:defRPr>
-            </a:pPr>
-            <a:r>
-              <a:t>   `FF:FF:FF:FF:FF:FF` (all 48 bits are 1s). Processed by every adapter on the local LAN broadcast domain.</a:t>
-            </a:r>
-          </a:p>
-          <a:p>
-            <a:pPr>
-              <a:spcAft>
-                <a:spcPts val="200"/>
-              </a:spcAft>
-              <a:defRPr b="1" sz="1500">
-                <a:solidFill>
-                  <a:srgbClr val="0F1E4A"/>
-                </a:solidFill>
-              </a:defRPr>
-            </a:pPr>
-            <a:r>
-              <a:t>• Multicast MAC Address</a:t>
-            </a:r>
-          </a:p>
-          <a:p>
-            <a:pPr>
-              <a:spcAft>
-                <a:spcPts val="800"/>
-              </a:spcAft>
-              <a:defRPr sz="1300">
-                <a:solidFill>
-                  <a:srgbClr val="1E293B"/>
-                </a:solidFill>
-              </a:defRPr>
-            </a:pPr>
-            <a:r>
-              <a:t>   Least Significant Bit of first byte is 1 (e.g. `01:00:5E:xx:xx:xx` for IPv4 multicast).</a:t>
+              <a:defRPr sz="1250">
+                <a:solidFill>
+                  <a:srgbClr val="0F172A"/>
+                </a:solidFill>
+              </a:defRPr>
+            </a:pPr>
+            <a:r>
+              <a:t>   **Proxy ARP**: Router responds to ARP request on behalf of a remote node. **Gratuitous ARP**: Host announces its own IP/MAC to detect duplicate IP conflicts and update switch MAC tables.</a:t>
             </a:r>
           </a:p>
         </p:txBody>
@@ -3623,14 +3732,14 @@
         </p:nvSpPr>
         <p:spPr>
           <a:xfrm>
-            <a:off x="7955279" y="1280160"/>
-            <a:ext cx="3566160" cy="4846320"/>
+            <a:off x="7955279" y="1234440"/>
+            <a:ext cx="3566160" cy="4892040"/>
           </a:xfrm>
           <a:prstGeom prst="roundRect">
             <a:avLst/>
           </a:prstGeom>
           <a:solidFill>
-            <a:srgbClr val="F1F5F9"/>
+            <a:srgbClr val="F8FAFC"/>
           </a:solidFill>
           <a:ln w="19050">
             <a:solidFill>
@@ -3668,7 +3777,7 @@
         </p:nvSpPr>
         <p:spPr>
           <a:xfrm>
-            <a:off x="8138160" y="1417320"/>
+            <a:off x="8138160" y="1371600"/>
             <a:ext cx="3200400" cy="4572000"/>
           </a:xfrm>
           <a:prstGeom prst="rect">
@@ -3693,7 +3802,7 @@
               </a:defRPr>
             </a:pPr>
             <a:r>
-              <a:t>MAC Address Structure</a:t>
+              <a:t>ARP Key Facts</a:t>
             </a:r>
           </a:p>
           <a:p>
@@ -3703,12 +3812,12 @@
               </a:spcAft>
               <a:defRPr sz="1200">
                 <a:solidFill>
-                  <a:srgbClr val="1E293B"/>
-                </a:solidFill>
-              </a:defRPr>
-            </a:pPr>
-            <a:r>
-              <a:t>→ First 3 Bytes (24b): OUI Vendor ID</a:t>
+                  <a:srgbClr val="0F172A"/>
+                </a:solidFill>
+              </a:defRPr>
+            </a:pPr>
+            <a:r>
+              <a:t>→ ARP Request: L2 Broadcast (FF:..:FF)</a:t>
             </a:r>
           </a:p>
           <a:p>
@@ -3718,12 +3827,12 @@
               </a:spcAft>
               <a:defRPr sz="1200">
                 <a:solidFill>
-                  <a:srgbClr val="1E293B"/>
-                </a:solidFill>
-              </a:defRPr>
-            </a:pPr>
-            <a:r>
-              <a:t>→ Last 3 Bytes (24b): Device Serial</a:t>
+                  <a:srgbClr val="0F172A"/>
+                </a:solidFill>
+              </a:defRPr>
+            </a:pPr>
+            <a:r>
+              <a:t>→ ARP Reply: L2 Unicast</a:t>
             </a:r>
           </a:p>
           <a:p>
@@ -3733,12 +3842,12 @@
               </a:spcAft>
               <a:defRPr sz="1200">
                 <a:solidFill>
-                  <a:srgbClr val="1E293B"/>
-                </a:solidFill>
-              </a:defRPr>
-            </a:pPr>
-            <a:r>
-              <a:t>→ Unicast: 00:1A:2B:3C:4D:5E</a:t>
+                  <a:srgbClr val="0F172A"/>
+                </a:solidFill>
+              </a:defRPr>
+            </a:pPr>
+            <a:r>
+              <a:t>→ L2 Frame Type: 0x0806 (ARP)</a:t>
             </a:r>
           </a:p>
           <a:p>
@@ -3748,12 +3857,12 @@
               </a:spcAft>
               <a:defRPr sz="1200">
                 <a:solidFill>
-                  <a:srgbClr val="1E293B"/>
-                </a:solidFill>
-              </a:defRPr>
-            </a:pPr>
-            <a:r>
-              <a:t>→ Broadcast: FF:FF:FF:FF:FF:FF</a:t>
+                  <a:srgbClr val="0F172A"/>
+                </a:solidFill>
+              </a:defRPr>
+            </a:pPr>
+            <a:r>
+              <a:t>→ ARP Cache: Dynamic IP-&gt;MAC table</a:t>
             </a:r>
           </a:p>
           <a:p>
@@ -3763,12 +3872,12 @@
               </a:spcAft>
               <a:defRPr sz="1200">
                 <a:solidFill>
-                  <a:srgbClr val="1E293B"/>
-                </a:solidFill>
-              </a:defRPr>
-            </a:pPr>
-            <a:r>
-              <a:t>→ Flat physical addressing</a:t>
+                  <a:srgbClr val="0F172A"/>
+                </a:solidFill>
+              </a:defRPr>
+            </a:pPr>
+            <a:r>
+              <a:t>→ Gratuitous ARP: IP conflict check</a:t>
             </a:r>
           </a:p>
         </p:txBody>
@@ -3781,8 +3890,8 @@
         </p:nvSpPr>
         <p:spPr>
           <a:xfrm>
-            <a:off x="731520" y="6309360"/>
-            <a:ext cx="10789920" cy="365760"/>
+            <a:off x="731520" y="6327648"/>
+            <a:ext cx="10789920" cy="320040"/>
           </a:xfrm>
           <a:prstGeom prst="rect">
             <a:avLst/>
@@ -3804,6 +3913,41 @@
             </a:pPr>
             <a:r>
               <a:t>PCCST501 Computer Networks | KTU 2024 Scheme | Prof. Anju Markose | Assistant Professor, Dept. of CSE | VJCET</a:t>
+            </a:r>
+          </a:p>
+        </p:txBody>
+      </p:sp>
+      <p:sp>
+        <p:nvSpPr>
+          <p:cNvPr id="10" name="TextBox 9"/>
+          <p:cNvSpPr txBox="1"/>
+          <p:nvPr/>
+        </p:nvSpPr>
+        <p:spPr>
+          <a:xfrm>
+            <a:off x="6858000" y="6327648"/>
+            <a:ext cx="4572000" cy="320040"/>
+          </a:xfrm>
+          <a:prstGeom prst="rect">
+            <a:avLst/>
+          </a:prstGeom>
+          <a:noFill/>
+        </p:spPr>
+        <p:txBody>
+          <a:bodyPr wrap="none">
+            <a:spAutoFit/>
+          </a:bodyPr>
+          <a:lstStyle/>
+          <a:p>
+            <a:pPr algn="r">
+              <a:defRPr sz="950">
+                <a:solidFill>
+                  <a:srgbClr val="64748B"/>
+                </a:solidFill>
+              </a:defRPr>
+            </a:pPr>
+            <a:r>
+              <a:t>Dept. of CSE, VJCET</a:t>
             </a:r>
           </a:p>
         </p:txBody>
@@ -3935,14 +4079,14 @@
           <a:lstStyle/>
           <a:p>
             <a:pPr>
-              <a:defRPr b="1" sz="2300">
+              <a:defRPr b="1" sz="2200">
                 <a:solidFill>
                   <a:srgbClr val="F8FAFC"/>
                 </a:solidFill>
               </a:defRPr>
             </a:pPr>
             <a:r>
-              <a:t>3.4.2 Address Resolution Protocol (ARP)</a:t>
+              <a:t>3.4.2 Packet Forwarding Across Subnets (MAC &amp; IP Rewriting)</a:t>
             </a:r>
           </a:p>
         </p:txBody>
@@ -3977,7 +4121,7 @@
               </a:defRPr>
             </a:pPr>
             <a:r>
-              <a:t>M3.4 ARP OPERATION</a:t>
+              <a:t>M3.4 SUBNET ROUTING</a:t>
             </a:r>
           </a:p>
         </p:txBody>
@@ -3990,7 +4134,7 @@
         </p:nvSpPr>
         <p:spPr>
           <a:xfrm>
-            <a:off x="731520" y="1280160"/>
+            <a:off x="731520" y="1234440"/>
             <a:ext cx="6858000" cy="4937760"/>
           </a:xfrm>
           <a:prstGeom prst="rect">
@@ -4008,29 +4152,29 @@
               <a:spcAft>
                 <a:spcPts val="200"/>
               </a:spcAft>
-              <a:defRPr b="1" sz="1500">
+              <a:defRPr b="1" sz="1450">
                 <a:solidFill>
                   <a:srgbClr val="0F1E4A"/>
                 </a:solidFill>
               </a:defRPr>
             </a:pPr>
             <a:r>
-              <a:t>• ARP Purpose</a:t>
+              <a:t>• Scenario: Host A (Subnet 1) sends packet to Host B (Subnet 2) via Router R</a:t>
             </a:r>
           </a:p>
           <a:p>
             <a:pPr>
               <a:spcAft>
-                <a:spcPts val="800"/>
+                <a:spcPts val="700"/>
               </a:spcAft>
-              <a:defRPr sz="1300">
-                <a:solidFill>
-                  <a:srgbClr val="1E293B"/>
-                </a:solidFill>
-              </a:defRPr>
-            </a:pPr>
-            <a:r>
-              <a:t>   Dynamically translates a known 32-bit IP address into its corresponding 48-bit MAC address on the same local subnet.</a:t>
+              <a:defRPr sz="1250">
+                <a:solidFill>
+                  <a:srgbClr val="0F172A"/>
+                </a:solidFill>
+              </a:defRPr>
+            </a:pPr>
+            <a:r>
+              <a:t>   Source Host A creates L3 IP packet: `Src IP = IP_A`, `Dst IP = IP_B` (IP addresses remain constant throughout end-to-end path).</a:t>
             </a:r>
           </a:p>
           <a:p>
@@ -4038,29 +4182,29 @@
               <a:spcAft>
                 <a:spcPts val="200"/>
               </a:spcAft>
-              <a:defRPr b="1" sz="1500">
+              <a:defRPr b="1" sz="1450">
                 <a:solidFill>
                   <a:srgbClr val="0F1E4A"/>
                 </a:solidFill>
               </a:defRPr>
             </a:pPr>
             <a:r>
-              <a:t>• ARP Request (Broadcast)</a:t>
+              <a:t>• Hop 1 (Host A -&gt; Router R)</a:t>
             </a:r>
           </a:p>
           <a:p>
             <a:pPr>
               <a:spcAft>
-                <a:spcPts val="800"/>
+                <a:spcPts val="700"/>
               </a:spcAft>
-              <a:defRPr sz="1300">
-                <a:solidFill>
-                  <a:srgbClr val="1E293B"/>
-                </a:solidFill>
-              </a:defRPr>
-            </a:pPr>
-            <a:r>
-              <a:t>   Sender broadcasts an Ethernet frame (`Dst MAC = FF:FF:FF:FF:FF:FF`) asking: 'Who has IP `192.168.1.5`? Tell `192.168.1.1`'.</a:t>
+              <a:defRPr sz="1250">
+                <a:solidFill>
+                  <a:srgbClr val="0F172A"/>
+                </a:solidFill>
+              </a:defRPr>
+            </a:pPr>
+            <a:r>
+              <a:t>   Host A inspects routing table; determines destination `IP_B` is outside local subnet. Encapsulates IP packet into L2 frame: `Src MAC = MAC_A`, `Dst MAC = MAC_Router_Interface_1` (uses ARP to find router MAC).</a:t>
             </a:r>
           </a:p>
           <a:p>
@@ -4068,29 +4212,29 @@
               <a:spcAft>
                 <a:spcPts val="200"/>
               </a:spcAft>
-              <a:defRPr b="1" sz="1500">
+              <a:defRPr b="1" sz="1450">
                 <a:solidFill>
                   <a:srgbClr val="0F1E4A"/>
                 </a:solidFill>
               </a:defRPr>
             </a:pPr>
             <a:r>
-              <a:t>• ARP Reply (Unicast)</a:t>
+              <a:t>• Router R Processing</a:t>
             </a:r>
           </a:p>
           <a:p>
             <a:pPr>
               <a:spcAft>
-                <a:spcPts val="800"/>
+                <a:spcPts val="700"/>
               </a:spcAft>
-              <a:defRPr sz="1300">
-                <a:solidFill>
-                  <a:srgbClr val="1E293B"/>
-                </a:solidFill>
-              </a:defRPr>
-            </a:pPr>
-            <a:r>
-              <a:t>   The host with target IP `192.168.1.5` responds with a unicast frame directly to sender's MAC containing its physical address.</a:t>
+              <a:defRPr sz="1250">
+                <a:solidFill>
+                  <a:srgbClr val="0F172A"/>
+                </a:solidFill>
+              </a:defRPr>
+            </a:pPr>
+            <a:r>
+              <a:t>   Router decapsulates L2 frame, inspects L3 `Dst IP = IP_B`, consults FIB routing table, decrements TTL, recomputes IP checksum, and determines outgoing Interface 2.</a:t>
             </a:r>
           </a:p>
           <a:p>
@@ -4098,29 +4242,29 @@
               <a:spcAft>
                 <a:spcPts val="200"/>
               </a:spcAft>
-              <a:defRPr b="1" sz="1500">
+              <a:defRPr b="1" sz="1450">
                 <a:solidFill>
                   <a:srgbClr val="0F1E4A"/>
                 </a:solidFill>
               </a:defRPr>
             </a:pPr>
             <a:r>
-              <a:t>• ARP Cache Table</a:t>
+              <a:t>• Hop 2 (Router R -&gt; Host B)</a:t>
             </a:r>
           </a:p>
           <a:p>
             <a:pPr>
               <a:spcAft>
-                <a:spcPts val="800"/>
+                <a:spcPts val="700"/>
               </a:spcAft>
-              <a:defRPr sz="1300">
-                <a:solidFill>
-                  <a:srgbClr val="1E293B"/>
-                </a:solidFill>
-              </a:defRPr>
-            </a:pPr>
-            <a:r>
-              <a:t>   Sender caches the `(IP, MAC, TTL)` mapping (typically for 20 minutes) to eliminate redundant broadcasts for future packets.</a:t>
+              <a:defRPr sz="1250">
+                <a:solidFill>
+                  <a:srgbClr val="0F172A"/>
+                </a:solidFill>
+              </a:defRPr>
+            </a:pPr>
+            <a:r>
+              <a:t>   Router encapsulates packet into a fresh L2 frame: `Src MAC = MAC_Router_Interface_2`, `Dst MAC = MAC_B` (via ARP on Subnet 2).</a:t>
             </a:r>
           </a:p>
           <a:p>
@@ -4128,29 +4272,29 @@
               <a:spcAft>
                 <a:spcPts val="200"/>
               </a:spcAft>
-              <a:defRPr b="1" sz="1500">
+              <a:defRPr b="1" sz="1450">
                 <a:solidFill>
                   <a:srgbClr val="0F1E4A"/>
                 </a:solidFill>
               </a:defRPr>
             </a:pPr>
             <a:r>
-              <a:t>• Gratuitous ARP &amp; Proxy ARP</a:t>
+              <a:t>• Core Takeaway</a:t>
             </a:r>
           </a:p>
           <a:p>
             <a:pPr>
               <a:spcAft>
-                <a:spcPts val="800"/>
+                <a:spcPts val="700"/>
               </a:spcAft>
-              <a:defRPr sz="1300">
-                <a:solidFill>
-                  <a:srgbClr val="1E293B"/>
-                </a:solidFill>
-              </a:defRPr>
-            </a:pPr>
-            <a:r>
-              <a:t>   Gratuitous ARP: Host announces its own IP/MAC on boot to detect IP address conflicts. Proxy ARP: Router responds on behalf of remote hosts.</a:t>
+              <a:defRPr sz="1250">
+                <a:solidFill>
+                  <a:srgbClr val="0F172A"/>
+                </a:solidFill>
+              </a:defRPr>
+            </a:pPr>
+            <a:r>
+              <a:t>   **IP addresses remain unchanged end-to-end; MAC addresses change at every single router hop!**</a:t>
             </a:r>
           </a:p>
         </p:txBody>
@@ -4163,14 +4307,14 @@
         </p:nvSpPr>
         <p:spPr>
           <a:xfrm>
-            <a:off x="7955279" y="1280160"/>
-            <a:ext cx="3566160" cy="4846320"/>
+            <a:off x="7955279" y="1234440"/>
+            <a:ext cx="3566160" cy="4892040"/>
           </a:xfrm>
           <a:prstGeom prst="roundRect">
             <a:avLst/>
           </a:prstGeom>
           <a:solidFill>
-            <a:srgbClr val="F1F5F9"/>
+            <a:srgbClr val="F8FAFC"/>
           </a:solidFill>
           <a:ln w="19050">
             <a:solidFill>
@@ -4208,7 +4352,7 @@
         </p:nvSpPr>
         <p:spPr>
           <a:xfrm>
-            <a:off x="8138160" y="1417320"/>
+            <a:off x="8138160" y="1371600"/>
             <a:ext cx="3200400" cy="4572000"/>
           </a:xfrm>
           <a:prstGeom prst="rect">
@@ -4233,7 +4377,7 @@
               </a:defRPr>
             </a:pPr>
             <a:r>
-              <a:t>ARP Protocol Flow</a:t>
+              <a:t>Hop-by-Hop Headers</a:t>
             </a:r>
           </a:p>
           <a:p>
@@ -4243,12 +4387,12 @@
               </a:spcAft>
               <a:defRPr sz="1200">
                 <a:solidFill>
-                  <a:srgbClr val="1E293B"/>
-                </a:solidFill>
-              </a:defRPr>
-            </a:pPr>
-            <a:r>
-              <a:t>→ 1. ARP Request -&gt; Broadcast (FF:..:FF)</a:t>
+                  <a:srgbClr val="0F172A"/>
+                </a:solidFill>
+              </a:defRPr>
+            </a:pPr>
+            <a:r>
+              <a:t>→ Hop 1: Src MAC_A -&gt; Dst MAC_R1</a:t>
             </a:r>
           </a:p>
           <a:p>
@@ -4258,12 +4402,12 @@
               </a:spcAft>
               <a:defRPr sz="1200">
                 <a:solidFill>
-                  <a:srgbClr val="1E293B"/>
-                </a:solidFill>
-              </a:defRPr>
-            </a:pPr>
-            <a:r>
-              <a:t>→ 2. Target Host -&gt; Unicast ARP Reply</a:t>
+                  <a:srgbClr val="0F172A"/>
+                </a:solidFill>
+              </a:defRPr>
+            </a:pPr>
+            <a:r>
+              <a:t>→ Hop 2: Src MAC_R2 -&gt; Dst MAC_B</a:t>
             </a:r>
           </a:p>
           <a:p>
@@ -4273,12 +4417,12 @@
               </a:spcAft>
               <a:defRPr sz="1200">
                 <a:solidFill>
-                  <a:srgbClr val="1E293B"/>
-                </a:solidFill>
-              </a:defRPr>
-            </a:pPr>
-            <a:r>
-              <a:t>→ 3. Host stores in ARP Cache Table</a:t>
+                  <a:srgbClr val="0F172A"/>
+                </a:solidFill>
+              </a:defRPr>
+            </a:pPr>
+            <a:r>
+              <a:t>→ End-to-End: Src IP_A -&gt; Dst IP_B</a:t>
             </a:r>
           </a:p>
           <a:p>
@@ -4288,12 +4432,12 @@
               </a:spcAft>
               <a:defRPr sz="1200">
                 <a:solidFill>
-                  <a:srgbClr val="1E293B"/>
-                </a:solidFill>
-              </a:defRPr>
-            </a:pPr>
-            <a:r>
-              <a:t>→ 4. Cache expires after TTL (20 min)</a:t>
+                  <a:srgbClr val="0F172A"/>
+                </a:solidFill>
+              </a:defRPr>
+            </a:pPr>
+            <a:r>
+              <a:t>→ L2 MAC rewritten per hop</a:t>
             </a:r>
           </a:p>
           <a:p>
@@ -4303,12 +4447,12 @@
               </a:spcAft>
               <a:defRPr sz="1200">
                 <a:solidFill>
-                  <a:srgbClr val="1E293B"/>
-                </a:solidFill>
-              </a:defRPr>
-            </a:pPr>
-            <a:r>
-              <a:t>→ Gratuitous ARP: Detects IP conflicts</a:t>
+                  <a:srgbClr val="0F172A"/>
+                </a:solidFill>
+              </a:defRPr>
+            </a:pPr>
+            <a:r>
+              <a:t>→ L3 IP preserved end-to-end</a:t>
             </a:r>
           </a:p>
         </p:txBody>
@@ -4321,8 +4465,8 @@
         </p:nvSpPr>
         <p:spPr>
           <a:xfrm>
-            <a:off x="731520" y="6309360"/>
-            <a:ext cx="10789920" cy="365760"/>
+            <a:off x="731520" y="6327648"/>
+            <a:ext cx="10789920" cy="320040"/>
           </a:xfrm>
           <a:prstGeom prst="rect">
             <a:avLst/>
@@ -4344,6 +4488,526 @@
             </a:pPr>
             <a:r>
               <a:t>PCCST501 Computer Networks | KTU 2024 Scheme | Prof. Anju Markose | Assistant Professor, Dept. of CSE | VJCET</a:t>
+            </a:r>
+          </a:p>
+        </p:txBody>
+      </p:sp>
+      <p:sp>
+        <p:nvSpPr>
+          <p:cNvPr id="10" name="TextBox 9"/>
+          <p:cNvSpPr txBox="1"/>
+          <p:nvPr/>
+        </p:nvSpPr>
+        <p:spPr>
+          <a:xfrm>
+            <a:off x="6858000" y="6327648"/>
+            <a:ext cx="4572000" cy="320040"/>
+          </a:xfrm>
+          <a:prstGeom prst="rect">
+            <a:avLst/>
+          </a:prstGeom>
+          <a:noFill/>
+        </p:spPr>
+        <p:txBody>
+          <a:bodyPr wrap="none">
+            <a:spAutoFit/>
+          </a:bodyPr>
+          <a:lstStyle/>
+          <a:p>
+            <a:pPr algn="r">
+              <a:defRPr sz="950">
+                <a:solidFill>
+                  <a:srgbClr val="64748B"/>
+                </a:solidFill>
+              </a:defRPr>
+            </a:pPr>
+            <a:r>
+              <a:t>Dept. of CSE, VJCET</a:t>
+            </a:r>
+          </a:p>
+        </p:txBody>
+      </p:sp>
+    </p:spTree>
+  </p:cSld>
+  <p:clrMapOvr>
+    <a:masterClrMapping/>
+  </p:clrMapOvr>
+</p:sld>
+</file>
+
+<file path=ppt/slides/slide4.xml><?xml version="1.0" encoding="utf-8"?>
+<p:sld xmlns:a="http://schemas.openxmlformats.org/drawingml/2006/main" xmlns:p="http://schemas.openxmlformats.org/presentationml/2006/main" xmlns:r="http://schemas.openxmlformats.org/officeDocument/2006/relationships">
+  <p:cSld>
+    <p:spTree>
+      <p:nvGrpSpPr>
+        <p:cNvPr id="1" name=""/>
+        <p:cNvGrpSpPr/>
+        <p:nvPr/>
+      </p:nvGrpSpPr>
+      <p:grpSpPr/>
+      <p:sp>
+        <p:nvSpPr>
+          <p:cNvPr id="2" name="Rectangle 1"/>
+          <p:cNvSpPr/>
+          <p:nvPr/>
+        </p:nvSpPr>
+        <p:spPr>
+          <a:xfrm>
+            <a:off x="0" y="0"/>
+            <a:ext cx="12191695" cy="1005840"/>
+          </a:xfrm>
+          <a:prstGeom prst="rect">
+            <a:avLst/>
+          </a:prstGeom>
+          <a:solidFill>
+            <a:srgbClr val="0F1E4A"/>
+          </a:solidFill>
+          <a:ln>
+            <a:noFill/>
+          </a:ln>
+        </p:spPr>
+        <p:style>
+          <a:lnRef idx="1">
+            <a:schemeClr val="accent1"/>
+          </a:lnRef>
+          <a:fillRef idx="3">
+            <a:schemeClr val="accent1"/>
+          </a:fillRef>
+          <a:effectRef idx="2">
+            <a:schemeClr val="accent1"/>
+          </a:effectRef>
+          <a:fontRef idx="minor">
+            <a:schemeClr val="lt1"/>
+          </a:fontRef>
+        </p:style>
+        <p:txBody>
+          <a:bodyPr rtlCol="0" anchor="ctr"/>
+          <a:lstStyle/>
+          <a:p>
+            <a:pPr algn="ctr"/>
+          </a:p>
+        </p:txBody>
+      </p:sp>
+      <p:sp>
+        <p:nvSpPr>
+          <p:cNvPr id="3" name="Rectangle 2"/>
+          <p:cNvSpPr/>
+          <p:nvPr/>
+        </p:nvSpPr>
+        <p:spPr>
+          <a:xfrm>
+            <a:off x="0" y="969264"/>
+            <a:ext cx="12191695" cy="36576"/>
+          </a:xfrm>
+          <a:prstGeom prst="rect">
+            <a:avLst/>
+          </a:prstGeom>
+          <a:solidFill>
+            <a:srgbClr val="D97706"/>
+          </a:solidFill>
+          <a:ln>
+            <a:noFill/>
+          </a:ln>
+        </p:spPr>
+        <p:style>
+          <a:lnRef idx="1">
+            <a:schemeClr val="accent1"/>
+          </a:lnRef>
+          <a:fillRef idx="3">
+            <a:schemeClr val="accent1"/>
+          </a:fillRef>
+          <a:effectRef idx="2">
+            <a:schemeClr val="accent1"/>
+          </a:effectRef>
+          <a:fontRef idx="minor">
+            <a:schemeClr val="lt1"/>
+          </a:fontRef>
+        </p:style>
+        <p:txBody>
+          <a:bodyPr rtlCol="0" anchor="ctr"/>
+          <a:lstStyle/>
+          <a:p>
+            <a:pPr algn="ctr"/>
+          </a:p>
+        </p:txBody>
+      </p:sp>
+      <p:sp>
+        <p:nvSpPr>
+          <p:cNvPr id="4" name="TextBox 3"/>
+          <p:cNvSpPr txBox="1"/>
+          <p:nvPr/>
+        </p:nvSpPr>
+        <p:spPr>
+          <a:xfrm>
+            <a:off x="731520" y="164592"/>
+            <a:ext cx="8412480" cy="685800"/>
+          </a:xfrm>
+          <a:prstGeom prst="rect">
+            <a:avLst/>
+          </a:prstGeom>
+          <a:noFill/>
+        </p:spPr>
+        <p:txBody>
+          <a:bodyPr wrap="none">
+            <a:spAutoFit/>
+          </a:bodyPr>
+          <a:lstStyle/>
+          <a:p>
+            <a:pPr>
+              <a:defRPr b="1" sz="2100">
+                <a:solidFill>
+                  <a:srgbClr val="F8FAFC"/>
+                </a:solidFill>
+              </a:defRPr>
+            </a:pPr>
+            <a:r>
+              <a:t>🎯 Exam Booster &amp; Review: MAC Addressing &amp; ARP</a:t>
+            </a:r>
+          </a:p>
+        </p:txBody>
+      </p:sp>
+      <p:sp>
+        <p:nvSpPr>
+          <p:cNvPr id="5" name="TextBox 4"/>
+          <p:cNvSpPr txBox="1"/>
+          <p:nvPr/>
+        </p:nvSpPr>
+        <p:spPr>
+          <a:xfrm>
+            <a:off x="8229600" y="164592"/>
+            <a:ext cx="3291840" cy="685800"/>
+          </a:xfrm>
+          <a:prstGeom prst="rect">
+            <a:avLst/>
+          </a:prstGeom>
+          <a:noFill/>
+        </p:spPr>
+        <p:txBody>
+          <a:bodyPr wrap="none">
+            <a:spAutoFit/>
+          </a:bodyPr>
+          <a:lstStyle/>
+          <a:p>
+            <a:pPr algn="r">
+              <a:defRPr b="1" sz="1300">
+                <a:solidFill>
+                  <a:srgbClr val="D97706"/>
+                </a:solidFill>
+              </a:defRPr>
+            </a:pPr>
+            <a:r>
+              <a:t>M3.4</a:t>
+            </a:r>
+          </a:p>
+        </p:txBody>
+      </p:sp>
+      <p:sp>
+        <p:nvSpPr>
+          <p:cNvPr id="6" name="Rounded Rectangle 5"/>
+          <p:cNvSpPr/>
+          <p:nvPr/>
+        </p:nvSpPr>
+        <p:spPr>
+          <a:xfrm>
+            <a:off x="731520" y="1234440"/>
+            <a:ext cx="5303520" cy="4892040"/>
+          </a:xfrm>
+          <a:prstGeom prst="roundRect">
+            <a:avLst/>
+          </a:prstGeom>
+          <a:solidFill>
+            <a:srgbClr val="FEF3C7"/>
+          </a:solidFill>
+          <a:ln w="19050">
+            <a:solidFill>
+              <a:srgbClr val="D97706"/>
+            </a:solidFill>
+          </a:ln>
+        </p:spPr>
+        <p:style>
+          <a:lnRef idx="1">
+            <a:schemeClr val="accent1"/>
+          </a:lnRef>
+          <a:fillRef idx="3">
+            <a:schemeClr val="accent1"/>
+          </a:fillRef>
+          <a:effectRef idx="2">
+            <a:schemeClr val="accent1"/>
+          </a:effectRef>
+          <a:fontRef idx="minor">
+            <a:schemeClr val="lt1"/>
+          </a:fontRef>
+        </p:style>
+        <p:txBody>
+          <a:bodyPr rtlCol="0" anchor="ctr"/>
+          <a:lstStyle/>
+          <a:p>
+            <a:pPr algn="ctr"/>
+          </a:p>
+        </p:txBody>
+      </p:sp>
+      <p:sp>
+        <p:nvSpPr>
+          <p:cNvPr id="7" name="TextBox 6"/>
+          <p:cNvSpPr txBox="1"/>
+          <p:nvPr/>
+        </p:nvSpPr>
+        <p:spPr>
+          <a:xfrm>
+            <a:off x="914400" y="1371600"/>
+            <a:ext cx="4937760" cy="4572000"/>
+          </a:xfrm>
+          <a:prstGeom prst="rect">
+            <a:avLst/>
+          </a:prstGeom>
+          <a:noFill/>
+        </p:spPr>
+        <p:txBody>
+          <a:bodyPr wrap="square">
+            <a:spAutoFit/>
+          </a:bodyPr>
+          <a:lstStyle/>
+          <a:p>
+            <a:pPr>
+              <a:spcAft>
+                <a:spcPts val="1000"/>
+              </a:spcAft>
+              <a:defRPr b="1" sz="1450">
+                <a:solidFill>
+                  <a:srgbClr val="D97706"/>
+                </a:solidFill>
+              </a:defRPr>
+            </a:pPr>
+            <a:r>
+              <a:t>📚 KTU High-Yield Questions (K3 Apply)</a:t>
+            </a:r>
+          </a:p>
+          <a:p>
+            <a:pPr>
+              <a:spcAft>
+                <a:spcPts val="700"/>
+              </a:spcAft>
+              <a:defRPr sz="1200">
+                <a:solidFill>
+                  <a:srgbClr val="0F172A"/>
+                </a:solidFill>
+              </a:defRPr>
+            </a:pPr>
+            <a:r>
+              <a:t>Q: Explain the operation of Address Resolution Protocol (ARP) with request and reply frame structures. (7 Marks)</a:t>
+            </a:r>
+          </a:p>
+          <a:p>
+            <a:pPr>
+              <a:spcAft>
+                <a:spcPts val="700"/>
+              </a:spcAft>
+              <a:defRPr sz="1200">
+                <a:solidFill>
+                  <a:srgbClr val="0F172A"/>
+                </a:solidFill>
+              </a:defRPr>
+            </a:pPr>
+            <a:r>
+              <a:t>Q: Trace the step-by-step changes in Source/Destination IP and Source/Destination MAC addresses as a packet travels from Host A to Host B across an intermediate router. (8 Marks)</a:t>
+            </a:r>
+          </a:p>
+        </p:txBody>
+      </p:sp>
+      <p:sp>
+        <p:nvSpPr>
+          <p:cNvPr id="8" name="Rounded Rectangle 7"/>
+          <p:cNvSpPr/>
+          <p:nvPr/>
+        </p:nvSpPr>
+        <p:spPr>
+          <a:xfrm>
+            <a:off x="6309360" y="1234440"/>
+            <a:ext cx="5212080" cy="4892040"/>
+          </a:xfrm>
+          <a:prstGeom prst="roundRect">
+            <a:avLst/>
+          </a:prstGeom>
+          <a:solidFill>
+            <a:srgbClr val="EEF2FF"/>
+          </a:solidFill>
+          <a:ln w="19050">
+            <a:solidFill>
+              <a:srgbClr val="0E7490"/>
+            </a:solidFill>
+          </a:ln>
+        </p:spPr>
+        <p:style>
+          <a:lnRef idx="1">
+            <a:schemeClr val="accent1"/>
+          </a:lnRef>
+          <a:fillRef idx="3">
+            <a:schemeClr val="accent1"/>
+          </a:fillRef>
+          <a:effectRef idx="2">
+            <a:schemeClr val="accent1"/>
+          </a:effectRef>
+          <a:fontRef idx="minor">
+            <a:schemeClr val="lt1"/>
+          </a:fontRef>
+        </p:style>
+        <p:txBody>
+          <a:bodyPr rtlCol="0" anchor="ctr"/>
+          <a:lstStyle/>
+          <a:p>
+            <a:pPr algn="ctr"/>
+          </a:p>
+        </p:txBody>
+      </p:sp>
+      <p:sp>
+        <p:nvSpPr>
+          <p:cNvPr id="9" name="TextBox 8"/>
+          <p:cNvSpPr txBox="1"/>
+          <p:nvPr/>
+        </p:nvSpPr>
+        <p:spPr>
+          <a:xfrm>
+            <a:off x="6492240" y="1371600"/>
+            <a:ext cx="4846320" cy="4572000"/>
+          </a:xfrm>
+          <a:prstGeom prst="rect">
+            <a:avLst/>
+          </a:prstGeom>
+          <a:noFill/>
+        </p:spPr>
+        <p:txBody>
+          <a:bodyPr wrap="square">
+            <a:spAutoFit/>
+          </a:bodyPr>
+          <a:lstStyle/>
+          <a:p>
+            <a:pPr>
+              <a:spcAft>
+                <a:spcPts val="1000"/>
+              </a:spcAft>
+              <a:defRPr b="1" sz="1450">
+                <a:solidFill>
+                  <a:srgbClr val="0E7490"/>
+                </a:solidFill>
+              </a:defRPr>
+            </a:pPr>
+            <a:r>
+              <a:t>💡 Critical Conceptual Takeaways</a:t>
+            </a:r>
+          </a:p>
+          <a:p>
+            <a:pPr>
+              <a:spcAft>
+                <a:spcPts val="600"/>
+              </a:spcAft>
+              <a:defRPr sz="1200">
+                <a:solidFill>
+                  <a:srgbClr val="0F172A"/>
+                </a:solidFill>
+              </a:defRPr>
+            </a:pPr>
+            <a:r>
+              <a:t>✔ ARP bridges Layer 3 IP addresses to Layer 2 physical MAC addresses.</a:t>
+            </a:r>
+          </a:p>
+          <a:p>
+            <a:pPr>
+              <a:spcAft>
+                <a:spcPts val="600"/>
+              </a:spcAft>
+              <a:defRPr sz="1200">
+                <a:solidFill>
+                  <a:srgbClr val="0F172A"/>
+                </a:solidFill>
+              </a:defRPr>
+            </a:pPr>
+            <a:r>
+              <a:t>✔ ARP requests are L2 broadcasts (`FF:FF:FF:FF:FF:FF`); ARP replies are L2 unicasts.</a:t>
+            </a:r>
+          </a:p>
+          <a:p>
+            <a:pPr>
+              <a:spcAft>
+                <a:spcPts val="600"/>
+              </a:spcAft>
+              <a:defRPr sz="1200">
+                <a:solidFill>
+                  <a:srgbClr val="0F172A"/>
+                </a:solidFill>
+              </a:defRPr>
+            </a:pPr>
+            <a:r>
+              <a:t>✔ L3 IP addresses identify end hosts; L2 MAC addresses identify next-hop network interfaces.</a:t>
+            </a:r>
+          </a:p>
+        </p:txBody>
+      </p:sp>
+      <p:sp>
+        <p:nvSpPr>
+          <p:cNvPr id="10" name="TextBox 9"/>
+          <p:cNvSpPr txBox="1"/>
+          <p:nvPr/>
+        </p:nvSpPr>
+        <p:spPr>
+          <a:xfrm>
+            <a:off x="731520" y="6327648"/>
+            <a:ext cx="10789920" cy="320040"/>
+          </a:xfrm>
+          <a:prstGeom prst="rect">
+            <a:avLst/>
+          </a:prstGeom>
+          <a:noFill/>
+        </p:spPr>
+        <p:txBody>
+          <a:bodyPr wrap="none">
+            <a:spAutoFit/>
+          </a:bodyPr>
+          <a:lstStyle/>
+          <a:p>
+            <a:pPr>
+              <a:defRPr sz="950">
+                <a:solidFill>
+                  <a:srgbClr val="64748B"/>
+                </a:solidFill>
+              </a:defRPr>
+            </a:pPr>
+            <a:r>
+              <a:t>PCCST501 Computer Networks | KTU 2024 Scheme | Prof. Anju Markose | Assistant Professor, Dept. of CSE | VJCET</a:t>
+            </a:r>
+          </a:p>
+        </p:txBody>
+      </p:sp>
+      <p:sp>
+        <p:nvSpPr>
+          <p:cNvPr id="11" name="TextBox 10"/>
+          <p:cNvSpPr txBox="1"/>
+          <p:nvPr/>
+        </p:nvSpPr>
+        <p:spPr>
+          <a:xfrm>
+            <a:off x="6858000" y="6327648"/>
+            <a:ext cx="4572000" cy="320040"/>
+          </a:xfrm>
+          <a:prstGeom prst="rect">
+            <a:avLst/>
+          </a:prstGeom>
+          <a:noFill/>
+        </p:spPr>
+        <p:txBody>
+          <a:bodyPr wrap="none">
+            <a:spAutoFit/>
+          </a:bodyPr>
+          <a:lstStyle/>
+          <a:p>
+            <a:pPr algn="r">
+              <a:defRPr sz="950">
+                <a:solidFill>
+                  <a:srgbClr val="64748B"/>
+                </a:solidFill>
+              </a:defRPr>
+            </a:pPr>
+            <a:r>
+              <a:t>Dept. of CSE, VJCET</a:t>
             </a:r>
           </a:p>
         </p:txBody>
